--- a/presentacion/Retono-Entrega1.pptx
+++ b/presentacion/Retono-Entrega1.pptx
@@ -1748,7 +1748,46 @@
       </p:sp>
       <p:sp>
         <p:nvSpPr>
-          <p:cNvPr id="6" name="Shape 4"/>
+          <p:cNvPr id="6" name="Text 4"/>
+          <p:cNvSpPr txBox="1"/>
+          <p:nvPr/>
+        </p:nvSpPr>
+        <p:spPr>
+          <a:xfrm>
+            <a:off x="822960" y="4617720"/>
+            <a:ext cx="6400800" cy="292608"/>
+          </a:xfrm>
+          <a:prstGeom prst="rect">
+            <a:avLst/>
+          </a:prstGeom>
+          <a:noFill/>
+          <a:ln/>
+        </p:spPr>
+        <p:txBody>
+          <a:bodyPr wrap="square" lIns="0" tIns="0" rIns="0" bIns="0" rtlCol="0" anchor="ctr"/>
+          <a:lstStyle/>
+          <a:p>
+            <a:pPr indent="0" marL="0">
+              <a:buNone/>
+            </a:pPr>
+            <a:r>
+              <a:rPr lang="en-US" sz="1300" b="1" dirty="0">
+                <a:solidFill>
+                  <a:srgbClr val="7FB069"/>
+                </a:solidFill>
+                <a:latin typeface="Courier New" pitchFamily="34" charset="0"/>
+                <a:ea typeface="Courier New" pitchFamily="34" charset="-122"/>
+                <a:cs typeface="Courier New" pitchFamily="34" charset="-120"/>
+              </a:rPr>
+              <a:t>github.com/Kepler2412/retono-app</a:t>
+            </a:r>
+            <a:endParaRPr lang="en-US" sz="1300" dirty="0"/>
+          </a:p>
+        </p:txBody>
+      </p:sp>
+      <p:sp>
+        <p:nvSpPr>
+          <p:cNvPr id="7" name="Shape 5"/>
           <p:cNvSpPr/>
           <p:nvPr/>
         </p:nvSpPr>
@@ -1771,7 +1810,7 @@
       </p:sp>
       <p:sp>
         <p:nvSpPr>
-          <p:cNvPr id="7" name="Text 5"/>
+          <p:cNvPr id="8" name="Text 6"/>
           <p:cNvSpPr txBox="1"/>
           <p:nvPr/>
         </p:nvSpPr>
@@ -1968,7 +2007,7 @@
         <p:spPr>
           <a:xfrm>
             <a:off x="731520" y="1828800"/>
-            <a:ext cx="10698480" cy="868680"/>
+            <a:ext cx="10698480" cy="960120"/>
           </a:xfrm>
           <a:prstGeom prst="rect">
             <a:avLst/>
@@ -1982,12 +2021,12 @@
           <a:p>
             <a:pPr indent="0" marL="0">
               <a:lnSpc>
-                <a:spcPts val="2100"/>
+                <a:spcPts val="2000"/>
               </a:lnSpc>
               <a:buNone/>
             </a:pPr>
             <a:r>
-              <a:rPr lang="en-US" sz="1400" dirty="0">
+              <a:rPr lang="en-US" sz="1350" dirty="0">
                 <a:solidFill>
                   <a:srgbClr val="4C5A50"/>
                 </a:solidFill>
@@ -1995,9 +2034,9 @@
                 <a:ea typeface="Calibri" pitchFamily="34" charset="-122"/>
                 <a:cs typeface="Calibri" pitchFamily="34" charset="-120"/>
               </a:rPr>
-              <a:t>Antioquia es el departamento de la región andina con mayor superficie deforestada. La restauración se ejecuta a través de viveros comunitarios y familias vinculadas a pago por servicios ambientales. El indicador que verifica la ejecución es la tasa de supervivencia por lote — y ese dato nace en campo.</a:t>
-            </a:r>
-            <a:endParaRPr lang="en-US" sz="1400" dirty="0"/>
+              <a:t>Antioquia perdió 7.197 hectáreas de bosque en 2024 (IDEAM), y fue también uno de los departamentos que más redujo su deforestación: hay un esfuerzo de restauración cuyo resultado hay que medir. Solo en cuencas abastecedoras se reforestaron 306 ha con 236.339 árboles en 24 municipios, y para 2025 se presupuestó el mantenimiento de 305 ha ya intervenidas. Ese mantenimiento se mide con la tasa de supervivencia por lote — y ese dato nace en campo.</a:t>
+            </a:r>
+            <a:endParaRPr lang="en-US" sz="1350" dirty="0"/>
           </a:p>
         </p:txBody>
       </p:sp>
@@ -2475,7 +2514,7 @@
                 <a:ea typeface="Calibri" pitchFamily="34" charset="-122"/>
                 <a:cs typeface="Calibri" pitchFamily="34" charset="-120"/>
               </a:rPr>
-              <a:t>La causa raíz es la conectividad: el uso de internet en centros poblados y rural disperso está cerca de 20 puntos por debajo de las cabeceras. El técnico no trabaja en un hogar conectado, trabaja en el lote.</a:t>
+              <a:t>La causa raíz es la conectividad: según el DANE (2024), el 80,5 % de las personas en cabeceras usó internet a diario, frente al 59,6 % en centros poblados y rural disperso. El técnico no trabaja en un hogar conectado, trabaja en el lote.</a:t>
             </a:r>
             <a:endParaRPr lang="en-US" sz="1250" dirty="0"/>
           </a:p>
@@ -9985,7 +10024,7 @@
                 <a:ea typeface="Calibri" pitchFamily="34" charset="-122"/>
                 <a:cs typeface="Calibri" pitchFamily="34" charset="-120"/>
               </a:rPr>
-              <a:t>Código por capas, 10 ADR, reglas de Firestore versionadas y manual de despliegue.</a:t>
+              <a:t>github.com/Kepler2412/retono-app · código por capas, 10 ADR y reglas de Firestore.</a:t>
             </a:r>
             <a:endParaRPr lang="en-US" sz="1150" dirty="0"/>
           </a:p>
@@ -10318,15 +10357,29 @@
               <a:buNone/>
             </a:pPr>
             <a:r>
-              <a:rPr lang="en-US" sz="1000" dirty="0">
-                <a:solidFill>
-                  <a:srgbClr val="6E7F72"/>
+              <a:rPr lang="en-US" sz="1000" b="1" dirty="0">
+                <a:solidFill>
+                  <a:srgbClr val="7FB069"/>
                 </a:solidFill>
                 <a:latin typeface="Courier New" pitchFamily="34" charset="0"/>
                 <a:ea typeface="Courier New" pitchFamily="34" charset="-122"/>
                 <a:cs typeface="Courier New" pitchFamily="34" charset="-120"/>
               </a:rPr>
-              <a:t>Yeison Alberto Gómez Amaya  ·  Diseño de Aplicaciones Móviles  ·  Católica del Norte  ·  2026</a:t>
+              <a:t>github.com/Kepler2412/retono-app</a:t>
+            </a:r>
+            <a:pPr indent="0" marL="0">
+              <a:buNone/>
+            </a:pPr>
+            <a:r>
+              <a:rPr lang="en-US" sz="1000" dirty="0">
+                <a:solidFill>
+                  <a:srgbClr val="6E7F72"/>
+                </a:solidFill>
+                <a:latin typeface="Courier New" pitchFamily="34" charset="0"/>
+                <a:ea typeface="Courier New" pitchFamily="34" charset="-122"/>
+                <a:cs typeface="Courier New" pitchFamily="34" charset="-120"/>
+              </a:rPr>
+              <a:t>   ·   Yeison Alberto Gómez Amaya   ·   Diseño de Aplicaciones Móviles   ·   Católica del Norte   ·   2026</a:t>
             </a:r>
             <a:endParaRPr lang="en-US" sz="1000" dirty="0"/>
           </a:p>
